--- a/week-04/presentations/ppts/day-04-latency-availability-rate-limits.pptx
+++ b/week-04/presentations/ppts/day-04-latency-availability-rate-limits.pptx
@@ -7466,16 +7466,7 @@
             </a:pPr>
             <a:r>
               <a:rPr/>
-              <a:t>“p ≤ ms % of the time over ”</a:t>
-            </a:r>
-          </a:p>
-          <a:p>
-            <a:pPr lvl="0" indent="0" marL="0">
-              <a:buNone/>
-            </a:pPr>
-            <a:r>
-              <a:rPr/>
-              <a:t>Anchor: when does the user give up?</a:t>
+              <a:t>“p ≤ ms % of the time over ” Anchor: when does the user give up?</a:t>
             </a:r>
           </a:p>
           <a:p>
@@ -7493,16 +7484,7 @@
             </a:pPr>
             <a:r>
               <a:rPr/>
-              <a:t>“% of requests succeed over ”</a:t>
-            </a:r>
-          </a:p>
-          <a:p>
-            <a:pPr lvl="0" indent="0" marL="0">
-              <a:buNone/>
-            </a:pPr>
-            <a:r>
-              <a:rPr/>
-              <a:t>Anchor: cost of a minute of downtime?</a:t>
+              <a:t>“% of requests succeed over ” Anchor: cost of a minute of downtime?</a:t>
             </a:r>
           </a:p>
           <a:p>
@@ -7520,16 +7502,7 @@
             </a:pPr>
             <a:r>
               <a:rPr/>
-              <a:t>“system handles  rps per ”</a:t>
-            </a:r>
-          </a:p>
-          <a:p>
-            <a:pPr lvl="0" indent="0" marL="0">
-              <a:buNone/>
-            </a:pPr>
-            <a:r>
-              <a:rPr/>
-              <a:t>Anchor: what abuse / accident are we protecting against?</a:t>
+              <a:t>“system handles  rps per ” Anchor: what abuse / accident are we protecting against?</a:t>
             </a:r>
           </a:p>
           <a:p>

--- a/week-04/presentations/ppts/day-04-latency-availability-rate-limits.pptx
+++ b/week-04/presentations/ppts/day-04-latency-availability-rate-limits.pptx
@@ -5515,6 +5515,56 @@
             <a:r>
               <a:rPr/>
               <a:t>📝 Worked SLOs (FieldPulse reconcile)</a:t>
+            </a:r>
+          </a:p>
+        </p:txBody>
+      </p:sp>
+      <p:sp>
+        <p:nvSpPr>
+          <p:cNvPr id="3" name="Content Placeholder 2"/>
+          <p:cNvSpPr>
+            <a:spLocks noGrp="1"/>
+          </p:cNvSpPr>
+          <p:nvPr>
+            <p:ph idx="1"/>
+          </p:nvPr>
+        </p:nvSpPr>
+        <p:spPr/>
+        <p:txBody>
+          <a:bodyPr/>
+          <a:lstStyle/>
+          <a:p>
+            <a:pPr lvl="0" indent="0">
+              <a:buNone/>
+            </a:pPr>
+            <a:r>
+              <a:rPr>
+                <a:latin typeface="Courier"/>
+              </a:rPr>
+              <a:t>### SLO — Latency
+**Measurement:** Reconcile modal open time, mobile client.
+**Target:** p95 ≤ 1000ms, 99% over 30 days.
+**Defense:** Dispatchers tap reconcile 30+ times/shift; &gt; 1s
+crosses the "I'd rather use paper" threshold (Wk 1
+interview Maria, Tier Sheet op-signal #2).
+**Verification:** Synthetic transaction in Datadog.
+### SLO — Availability
+**Measurement:** Successful (non-5xx) reconcile submissions.
+**Target:** 99.5% over 30 days.
+**Error budget:** ~3.6 hrs/month.
+**Defense:** Dispatch volume averages 200 reconciles/day; 30-min
+outage during peak shift = ~50 affected dispatchers.
+**Verification:** Pingdom + 5xx alerting.
+**Budget consequence:** If 7-day rolling burns &gt;50% of budget,
+we freeze new feature merges and prioritize reliability.
+### Rate-limit policy
+**Per-user:** 10 reconcile-submits/sec, burst 30.
+**Per-tenant:** 100 reconcile-submits/sec.
+**Failure mode:** HTTP 429 with Retry-After header; client
+implements exponential backoff with jitter.
+**Defense:** Protects against runaway script bug seen in the
+2024 dispatcher-tool incident.
+**Verification:** Load test before launch; rate-limit cap dashboard.</a:t>
             </a:r>
           </a:p>
         </p:txBody>

--- a/week-04/presentations/ppts/day-04-latency-availability-rate-limits.pptx
+++ b/week-04/presentations/ppts/day-04-latency-availability-rate-limits.pptx
@@ -1448,7 +1448,7 @@
             </a:pPr>
             <a:r>
               <a:rPr/>
-              <a:t>By 16:00, every triad has TCD §4 drafted with all three SLOs.</a:t>
+              <a:t>By 16:00, every triad has TCD Section 4 drafted with all three SLOs.</a:t>
             </a:r>
           </a:p>
         </p:txBody>
@@ -6463,7 +6463,7 @@
             </a:pPr>
             <a:r>
               <a:rPr/>
-              <a:t>🧿 AI Sanity Check</a:t>
+              <a:t>🤖 AI Sanity Check</a:t>
             </a:r>
           </a:p>
         </p:txBody>
@@ -6565,7 +6565,7 @@
             </a:pPr>
             <a:r>
               <a:rPr/>
-              <a:t>10 min: revise §4 + provenance note</a:t>
+              <a:t>10 min: revise Section 4 + provenance note</a:t>
             </a:r>
           </a:p>
           <a:p>
@@ -6691,7 +6691,7 @@
             </a:pPr>
             <a:r>
               <a:rPr/>
-              <a:t>TCD §4 drafted</a:t>
+              <a:t>TCD Section 4 drafted</a:t>
             </a:r>
           </a:p>
           <a:p>
@@ -6718,7 +6718,7 @@
             </a:pPr>
             <a:r>
               <a:rPr/>
-              <a:t>Friday: assemble TCD §§5–6</a:t>
+              <a:t>Friday: assemble TCD Sections 5–6</a:t>
             </a:r>
           </a:p>
           <a:p>
@@ -6745,7 +6745,7 @@
             </a:pPr>
             <a:r>
               <a:rPr/>
-              <a:t>Bring to Day 5: Your TCD §§1–4. Tomorrow integrates everything into the final TCD.</a:t>
+              <a:t>Bring to Day 5: Your TCD Sections 1–4. Tomorrow integrates everything into the final TCD.</a:t>
             </a:r>
           </a:p>
         </p:txBody>

--- a/week-04/presentations/ppts/day-04-latency-availability-rate-limits.pptx
+++ b/week-04/presentations/ppts/day-04-latency-availability-rate-limits.pptx
@@ -5966,7 +5966,7 @@
             </a:pPr>
             <a:r>
               <a:rPr/>
-              <a:t>These are starting points. Use real platform numbers if available.</a:t>
+              <a:t>These are starting points — even a Transport Layer Security (TLS) handshake varies by platform. Use real platform numbers if available.</a:t>
             </a:r>
           </a:p>
         </p:txBody>
@@ -6691,7 +6691,7 @@
             </a:pPr>
             <a:r>
               <a:rPr/>
-              <a:t>TCD Section 4 drafted</a:t>
+              <a:t>Technical Concept Document (TCD) Section 4 drafted</a:t>
             </a:r>
           </a:p>
           <a:p>
@@ -6892,7 +6892,7 @@
             </a:pPr>
             <a:r>
               <a:rPr/>
-              <a:t>Distinguish SLI / SLO / SLA / error budget</a:t>
+              <a:t>Distinguish Service Level Indicator (SLI) / Service Level Objective (SLO) / Service Level Agreement (SLA) / error budget</a:t>
             </a:r>
           </a:p>
           <a:p>

--- a/week-04/presentations/ppts/day-04-latency-availability-rate-limits.pptx
+++ b/week-04/presentations/ppts/day-04-latency-availability-rate-limits.pptx
@@ -5912,7 +5912,7 @@
             </a:pPr>
             <a:r>
               <a:rPr/>
-              <a:t>Async publish (Kafka/SQS local)</a:t>
+              <a:t>Async publish (Event Hubs/Service Bus local)</a:t>
             </a:r>
           </a:p>
           <a:p>
@@ -6033,6 +6033,35 @@
           <a:bodyPr/>
           <a:lstStyle/>
           <a:p>
+            <a:pPr lvl="0" indent="0">
+              <a:buNone/>
+            </a:pPr>
+            <a:r>
+              <a:rPr>
+                <a:latin typeface="Courier"/>
+              </a:rPr>
+              <a:t>SLO target: p95 ≤ 1000ms
+Path: Mobile → API GW → Reconcile → Postgres read
+→ Tickets module
+→ Postgres write
+→ Audit publish
+→ response back
+Estimated:
+Mobile→API GW round trip:    80ms
+API GW → Reconcile:           20ms
+Postgres read:                30ms
+Tickets module call (sync):  100ms ← dominates
+Postgres write:               40ms
+Audit publish (async):        10ms
+Reconcile → API GW response:  20ms
+Response back:                80ms
+─────
+~380ms median
+p95 likely ~700–900ms ✓
+</a:t>
+            </a:r>
+          </a:p>
+          <a:p>
             <a:pPr lvl="0" indent="0" marL="0">
               <a:buNone/>
             </a:pPr>
@@ -6468,6 +6497,42 @@
           </a:p>
         </p:txBody>
       </p:sp>
+      <p:sp>
+        <p:nvSpPr>
+          <p:cNvPr id="3" name="Content Placeholder 2"/>
+          <p:cNvSpPr>
+            <a:spLocks noGrp="1"/>
+          </p:cNvSpPr>
+          <p:nvPr>
+            <p:ph idx="1"/>
+          </p:nvPr>
+        </p:nvSpPr>
+        <p:spPr/>
+        <p:txBody>
+          <a:bodyPr/>
+          <a:lstStyle/>
+          <a:p>
+            <a:pPr lvl="0" indent="0">
+              <a:buNone/>
+            </a:pPr>
+            <a:r>
+              <a:rPr>
+                <a:latin typeface="Courier"/>
+              </a:rPr>
+              <a:t>Role: Senior reliability engineer reviewing a feature's SLO sheet.
+Context: &lt;paste SLO sheet + latency walk + rate-limit policy&gt;
+Architecture stance: &lt;paste TCD Section 1&gt;
+Task: Identify the top 3 reasons the SLOs as written might
+not be sustainable.
+Constraints:
+- Use only the information provided; do not invent platform details
+- Be specific: which SLO, which scenario, which condition
+- Suggest a more realistic alternative for each
+Format: Numbered list — Issue / Scenario / Suggested target.</a:t>
+            </a:r>
+          </a:p>
+        </p:txBody>
+      </p:sp>
     </p:spTree>
   </p:cSld>
 </p:sld>
@@ -7516,7 +7581,7 @@
             </a:pPr>
             <a:r>
               <a:rPr/>
-              <a:t>“p ≤ ms % of the time over ” Anchor: when does the user give up?</a:t>
+              <a:t>“p&lt;N&gt; ≤ &lt;X&gt;ms &lt;PCT&gt;% of the time over &lt;window&gt;” Anchor: when does the user give up?</a:t>
             </a:r>
           </a:p>
           <a:p>
@@ -7534,7 +7599,7 @@
             </a:pPr>
             <a:r>
               <a:rPr/>
-              <a:t>“% of requests succeed over ” Anchor: cost of a minute of downtime?</a:t>
+              <a:t>“&lt;N&gt;% of requests succeed over &lt;window&gt;” Anchor: cost of a minute of downtime?</a:t>
             </a:r>
           </a:p>
           <a:p>
@@ -7552,7 +7617,7 @@
             </a:pPr>
             <a:r>
               <a:rPr/>
-              <a:t>“system handles  rps per ” Anchor: what abuse / accident are we protecting against?</a:t>
+              <a:t>“system handles &lt;X&gt; rps per &lt;scope&gt;” Anchor: what abuse / accident are we protecting against?</a:t>
             </a:r>
           </a:p>
           <a:p>

--- a/week-04/presentations/ppts/day-04-latency-availability-rate-limits.pptx
+++ b/week-04/presentations/ppts/day-04-latency-availability-rate-limits.pptx
@@ -874,7 +874,7 @@
             </a:pPr>
             <a:r>
               <a:rPr/>
-              <a:t>The hop-by-hop walk is where aspirational SLOs get caught. If a triad’s per-hop budget sums above the target, the SLO isn’t real — surface that gap.</a:t>
+              <a:t>The hop-by-hop walk is where aspirational SLOs get caught. If a quad’s per-hop budget sums above the target, the SLO isn’t real — surface that gap.</a:t>
             </a:r>
           </a:p>
         </p:txBody>
@@ -1038,7 +1038,7 @@
             </a:pPr>
             <a:r>
               <a:rPr/>
-              <a:t>The “Tickets module dominates” finding is the kind of architecture conversation triads should bring to Friday.</a:t>
+              <a:t>The “Tickets module dominates” finding is the kind of architecture conversation quads should bring to Friday.</a:t>
             </a:r>
           </a:p>
         </p:txBody>
@@ -1448,7 +1448,7 @@
             </a:pPr>
             <a:r>
               <a:rPr/>
-              <a:t>By 16:00, every triad has TCD Section 4 drafted with all three SLOs.</a:t>
+              <a:t>By 16:00, every quad has TCD Section 4 drafted with all three SLOs.</a:t>
             </a:r>
           </a:p>
         </p:txBody>
@@ -1530,7 +1530,7 @@
             </a:pPr>
             <a:r>
               <a:rPr/>
-              <a:t>Wrap-share: each triad names 1 SLO they’d defend hard, 1 they’re worried is aspirational, 1 error-budget consequence they’d accept.</a:t>
+              <a:t>Wrap-share: each quad names 1 SLO they’d defend hard, 1 they’re worried is aspirational, 1 error-budget consequence they’d accept.</a:t>
             </a:r>
           </a:p>
         </p:txBody>
@@ -1858,7 +1858,7 @@
             </a:pPr>
             <a:r>
               <a:rPr/>
-              <a:t>Confusing SLI with SLO is the most common TPM blunder in this space. Spend the time to nail definitions before triads set numbers.</a:t>
+              <a:t>Confusing SLI with SLO is the most common TPM blunder in this space. Spend the time to nail definitions before quads set numbers.</a:t>
             </a:r>
           </a:p>
         </p:txBody>
@@ -5639,7 +5639,7 @@
             </a:pPr>
             <a:r>
               <a:rPr b="1"/>
-              <a:t>Triads • 40 minutes</a:t>
+              <a:t>Quads • 40 minutes</a:t>
             </a:r>
           </a:p>
           <a:p>
@@ -6142,7 +6142,7 @@
             </a:pPr>
             <a:r>
               <a:rPr b="1"/>
-              <a:t>Triads • 40 minutes</a:t>
+              <a:t>Quads • 40 minutes</a:t>
             </a:r>
           </a:p>
           <a:p>
@@ -6370,7 +6370,7 @@
             </a:pPr>
             <a:r>
               <a:rPr/>
-              <a:t>Author triad listens, captures, decides. Same Week-3 review discipline.</a:t>
+              <a:t>Author quad listens, captures, decides. Same Week-3 review discipline.</a:t>
             </a:r>
           </a:p>
         </p:txBody>
@@ -6603,7 +6603,7 @@
             </a:pPr>
             <a:r>
               <a:rPr b="1"/>
-              <a:t>Triad pairs • 45 minutes • Wrap</a:t>
+              <a:t>Quad pairs • 45 minutes • Wrap</a:t>
             </a:r>
           </a:p>
           <a:p>
@@ -6801,7 +6801,7 @@
             </a:pPr>
             <a:r>
               <a:rPr/>
-              <a:t>Cross-triad review of the full TCD</a:t>
+              <a:t>Cross-quad review of the full TCD</a:t>
             </a:r>
           </a:p>
           <a:p>
@@ -7872,7 +7872,7 @@
             </a:pPr>
             <a:r>
               <a:rPr b="1"/>
-              <a:t>Triads • 35 minutes</a:t>
+              <a:t>Quads • 35 minutes</a:t>
             </a:r>
           </a:p>
           <a:p>

--- a/week-04/presentations/ppts/day-04-latency-availability-rate-limits.pptx
+++ b/week-04/presentations/ppts/day-04-latency-availability-rate-limits.pptx
@@ -5639,7 +5639,7 @@
             </a:pPr>
             <a:r>
               <a:rPr b="1"/>
-              <a:t>Quads • 40 minutes</a:t>
+              <a:t>Quads • 50 minutes</a:t>
             </a:r>
           </a:p>
           <a:p>
@@ -6142,7 +6142,7 @@
             </a:pPr>
             <a:r>
               <a:rPr b="1"/>
-              <a:t>Quads • 40 minutes</a:t>
+              <a:t>Quads • 50 minutes</a:t>
             </a:r>
           </a:p>
           <a:p>
@@ -6603,7 +6603,7 @@
             </a:pPr>
             <a:r>
               <a:rPr b="1"/>
-              <a:t>Quad pairs • 45 minutes • Wrap</a:t>
+              <a:t>Quad pairs • 55 minutes • Wrap</a:t>
             </a:r>
           </a:p>
           <a:p>
@@ -7872,7 +7872,7 @@
             </a:pPr>
             <a:r>
               <a:rPr b="1"/>
-              <a:t>Quads • 35 minutes</a:t>
+              <a:t>Quads • 45 minutes</a:t>
             </a:r>
           </a:p>
           <a:p>

--- a/week-04/presentations/ppts/day-04-latency-availability-rate-limits.pptx
+++ b/week-04/presentations/ppts/day-04-latency-availability-rate-limits.pptx
@@ -5648,7 +5648,7 @@
             </a:pPr>
             <a:r>
               <a:rPr/>
-              <a:t>15 min: latency SLO (percentile + window + defense)</a:t>
+              <a:t>25 min: latency SLO (percentile + window + defense)</a:t>
             </a:r>
           </a:p>
           <a:p>
@@ -5675,7 +5675,7 @@
             </a:pPr>
             <a:r>
               <a:rPr/>
-              <a:t>⏱ 15 + 10 + 15</a:t>
+              <a:t>⏱ 25 + 10 + 15</a:t>
             </a:r>
           </a:p>
         </p:txBody>
@@ -6160,7 +6160,7 @@
             </a:pPr>
             <a:r>
               <a:rPr/>
-              <a:t>15 min: annotate per-hop latency</a:t>
+              <a:t>25 min: annotate per-hop latency</a:t>
             </a:r>
           </a:p>
           <a:p>
@@ -6196,7 +6196,7 @@
             </a:pPr>
             <a:r>
               <a:rPr/>
-              <a:t>⏱ 15 + 10 + 10 + 5</a:t>
+              <a:t>⏱ 25 + 10 + 10 + 5</a:t>
             </a:r>
           </a:p>
         </p:txBody>
@@ -6612,7 +6612,7 @@
             </a:pPr>
             <a:r>
               <a:rPr/>
-              <a:t>20 min: cross-review (3 questions)</a:t>
+              <a:t>30 min: cross-review (3 questions)</a:t>
             </a:r>
           </a:p>
           <a:p>
@@ -6639,7 +6639,7 @@
             </a:pPr>
             <a:r>
               <a:rPr/>
-              <a:t>⏱ 20 + 15 + 10 · 15-min wrap</a:t>
+              <a:t>⏱ 30 + 15 + 10 · 15-min wrap</a:t>
             </a:r>
           </a:p>
         </p:txBody>
@@ -7890,7 +7890,7 @@
             </a:pPr>
             <a:r>
               <a:rPr/>
-              <a:t>15 min: triage</a:t>
+              <a:t>25 min: triage</a:t>
             </a:r>
           </a:p>
           <a:p>
@@ -7917,7 +7917,7 @@
             </a:pPr>
             <a:r>
               <a:rPr/>
-              <a:t>⏱ 15 + 15 + 5</a:t>
+              <a:t>⏱ 25 + 15 + 5</a:t>
             </a:r>
           </a:p>
         </p:txBody>
